--- a/entregables/presentaciones/IQS_B6_Percepcion_SLAM.pptx
+++ b/entregables/presentaciones/IQS_B6_Percepcion_SLAM.pptx
@@ -523,7 +523,7 @@
           <a:lstStyle/>
           <a:p>
             <a:r>
-              <a:t>Encuadre del bloque: la mitad percibir de la tríada. Avisar del calendario: el viernes 6 es el parcial 1, así que la docencia empieza el miércoles 11 y el bloque va compactado en ocho horas (visión, estimación probabilística y SLAM).</a:t>
+              <a:t>Encuadre del bloque: la parte de percibir de la tríada. Avisar del calendario: el viernes 6 es el parcial 1, así que la docencia empieza el miércoles 11 y el bloque va compactado en ocho horas (visión, estimación probabilística y SLAM).</a:t>
             </a:r>
           </a:p>
         </p:txBody>
@@ -3345,7 +3345,7 @@
                 <a:ea typeface="Calibri" pitchFamily="34" charset="-122"/>
                 <a:cs typeface="Calibri" pitchFamily="34" charset="-120"/>
               </a:rPr>
-              <a:t>Una ventana recorre la imagen combinando vecindarios: suavizado gaussiano, realce, derivadas. Es la operación base, y la misma que ejecuta cada capa convolucional del bloque siguiente.</a:t>
+              <a:t>Una ventana recorre la imagen combinando vecindarios: suavizado gaussiano, realce, derivadas. Es la operación base, y la misma que ejecuta cada capa convolucional de la sesión siguiente.</a:t>
             </a:r>
             <a:endParaRPr lang="en-US" sz="1150" dirty="0"/>
           </a:p>
@@ -11619,7 +11619,7 @@
                 <a:ea typeface="Calibri" pitchFamily="34" charset="-122"/>
                 <a:cs typeface="Calibri" pitchFamily="34" charset="-120"/>
               </a:rPr>
-              <a:t>Cámaras en lugar de LiDAR; y una frontera de investigación activa donde el mapa es una representación neuronal (NeRF, 3D Gaussian Splatting) en vez de una nube de puntos.</a:t>
+              <a:t>Cámaras en lugar de LiDAR; y una frontera de investigación activa donde el mapa es una representación aprendida (NeRF, neuronal; 3D Gaussian Splatting, de primitivas explícitas) en vez de una nube de puntos.</a:t>
             </a:r>
             <a:endParaRPr lang="en-US" sz="1150" dirty="0"/>
           </a:p>

--- a/entregables/presentaciones/IQS_B6_Percepcion_SLAM.pptx
+++ b/entregables/presentaciones/IQS_B6_Percepcion_SLAM.pptx
@@ -5039,6 +5039,43 @@
           </a:p>
         </p:txBody>
       </p:sp>
+      <p:sp>
+        <p:nvSpPr>
+          <p:cNvPr id="8" name="TextBox 7">
+            <a:hlinkClick r:id="rId3"/>
+          </p:cNvPr>
+          <p:cNvSpPr txBox="1"/>
+          <p:nvPr/>
+        </p:nvSpPr>
+        <p:spPr>
+          <a:xfrm>
+            <a:off x="2057400" y="3310128"/>
+            <a:ext cx="5486400" cy="347472"/>
+          </a:xfrm>
+          <a:prstGeom prst="rect">
+            <a:avLst/>
+          </a:prstGeom>
+          <a:noFill/>
+        </p:spPr>
+        <p:txBody>
+          <a:bodyPr wrap="square" lIns="0" tIns="0" bIns="0" rIns="0">
+            <a:noAutofit/>
+          </a:bodyPr>
+          <a:lstStyle/>
+          <a:p>
+            <a:pPr algn="l"/>
+            <a:r>
+              <a:rPr sz="1400" b="1">
+                <a:solidFill>
+                  <a:srgbClr val="2FD26E"/>
+                </a:solidFill>
+                <a:latin typeface="Calibri"/>
+              </a:rPr>
+              <a:t>▸  Abrir en Colab · cuaderno S28</a:t>
+            </a:r>
+          </a:p>
+        </p:txBody>
+      </p:sp>
     </p:spTree>
   </p:cSld>
   <p:clrMapOvr>
@@ -6902,6 +6939,43 @@
           </a:p>
         </p:txBody>
       </p:sp>
+      <p:sp>
+        <p:nvSpPr>
+          <p:cNvPr id="8" name="TextBox 7">
+            <a:hlinkClick r:id="rId3"/>
+          </p:cNvPr>
+          <p:cNvSpPr txBox="1"/>
+          <p:nvPr/>
+        </p:nvSpPr>
+        <p:spPr>
+          <a:xfrm>
+            <a:off x="2057400" y="3310128"/>
+            <a:ext cx="5486400" cy="347472"/>
+          </a:xfrm>
+          <a:prstGeom prst="rect">
+            <a:avLst/>
+          </a:prstGeom>
+          <a:noFill/>
+        </p:spPr>
+        <p:txBody>
+          <a:bodyPr wrap="square" lIns="0" tIns="0" bIns="0" rIns="0">
+            <a:noAutofit/>
+          </a:bodyPr>
+          <a:lstStyle/>
+          <a:p>
+            <a:pPr algn="l"/>
+            <a:r>
+              <a:rPr sz="1400" b="1">
+                <a:solidFill>
+                  <a:srgbClr val="2FD26E"/>
+                </a:solidFill>
+                <a:latin typeface="Calibri"/>
+              </a:rPr>
+              <a:t>▸  Abrir en Colab · cuaderno S29</a:t>
+            </a:r>
+          </a:p>
+        </p:txBody>
+      </p:sp>
     </p:spTree>
   </p:cSld>
   <p:clrMapOvr>
@@ -7987,6 +8061,43 @@
           </a:p>
         </p:txBody>
       </p:sp>
+      <p:sp>
+        <p:nvSpPr>
+          <p:cNvPr id="8" name="TextBox 7">
+            <a:hlinkClick r:id="rId3"/>
+          </p:cNvPr>
+          <p:cNvSpPr txBox="1"/>
+          <p:nvPr/>
+        </p:nvSpPr>
+        <p:spPr>
+          <a:xfrm>
+            <a:off x="2057400" y="3310128"/>
+            <a:ext cx="5486400" cy="347472"/>
+          </a:xfrm>
+          <a:prstGeom prst="rect">
+            <a:avLst/>
+          </a:prstGeom>
+          <a:noFill/>
+        </p:spPr>
+        <p:txBody>
+          <a:bodyPr wrap="square" lIns="0" tIns="0" bIns="0" rIns="0">
+            <a:noAutofit/>
+          </a:bodyPr>
+          <a:lstStyle/>
+          <a:p>
+            <a:pPr algn="l"/>
+            <a:r>
+              <a:rPr sz="1400" b="1">
+                <a:solidFill>
+                  <a:srgbClr val="2FD26E"/>
+                </a:solidFill>
+                <a:latin typeface="Calibri"/>
+              </a:rPr>
+              <a:t>▸  Abrir en Colab · cuaderno S30</a:t>
+            </a:r>
+          </a:p>
+        </p:txBody>
+      </p:sp>
     </p:spTree>
   </p:cSld>
   <p:clrMapOvr>
@@ -10416,6 +10527,43 @@
           </a:p>
         </p:txBody>
       </p:sp>
+      <p:sp>
+        <p:nvSpPr>
+          <p:cNvPr id="12" name="TextBox 11">
+            <a:hlinkClick r:id="rId4"/>
+          </p:cNvPr>
+          <p:cNvSpPr txBox="1"/>
+          <p:nvPr/>
+        </p:nvSpPr>
+        <p:spPr>
+          <a:xfrm>
+            <a:off x="2057400" y="3310128"/>
+            <a:ext cx="5486400" cy="347472"/>
+          </a:xfrm>
+          <a:prstGeom prst="rect">
+            <a:avLst/>
+          </a:prstGeom>
+          <a:noFill/>
+        </p:spPr>
+        <p:txBody>
+          <a:bodyPr wrap="square" lIns="0" tIns="0" bIns="0" rIns="0">
+            <a:noAutofit/>
+          </a:bodyPr>
+          <a:lstStyle/>
+          <a:p>
+            <a:pPr algn="l"/>
+            <a:r>
+              <a:rPr sz="1400" b="1">
+                <a:solidFill>
+                  <a:srgbClr val="2FD26E"/>
+                </a:solidFill>
+                <a:latin typeface="Calibri"/>
+              </a:rPr>
+              <a:t>▸  Abrir en Colab · cuaderno S31</a:t>
+            </a:r>
+          </a:p>
+        </p:txBody>
+      </p:sp>
     </p:spTree>
   </p:cSld>
   <p:clrMapOvr>
@@ -13123,6 +13271,43 @@
           </a:p>
         </p:txBody>
       </p:sp>
+      <p:sp>
+        <p:nvSpPr>
+          <p:cNvPr id="12" name="TextBox 11">
+            <a:hlinkClick r:id="rId4"/>
+          </p:cNvPr>
+          <p:cNvSpPr txBox="1"/>
+          <p:nvPr/>
+        </p:nvSpPr>
+        <p:spPr>
+          <a:xfrm>
+            <a:off x="2057400" y="3310128"/>
+            <a:ext cx="5486400" cy="347472"/>
+          </a:xfrm>
+          <a:prstGeom prst="rect">
+            <a:avLst/>
+          </a:prstGeom>
+          <a:noFill/>
+        </p:spPr>
+        <p:txBody>
+          <a:bodyPr wrap="square" lIns="0" tIns="0" bIns="0" rIns="0">
+            <a:noAutofit/>
+          </a:bodyPr>
+          <a:lstStyle/>
+          <a:p>
+            <a:pPr algn="l"/>
+            <a:r>
+              <a:rPr sz="1400" b="1">
+                <a:solidFill>
+                  <a:srgbClr val="2FD26E"/>
+                </a:solidFill>
+                <a:latin typeface="Calibri"/>
+              </a:rPr>
+              <a:t>▸  Abrir en Colab · cuaderno S25 imagen y calibración</a:t>
+            </a:r>
+          </a:p>
+        </p:txBody>
+      </p:sp>
     </p:spTree>
   </p:cSld>
   <p:clrMapOvr>
@@ -14665,6 +14850,80 @@
               <a:t>Convolución y bordes · regiones y puntos · rasgos aprendidos · el criterio del ingeniero</a:t>
             </a:r>
             <a:endParaRPr lang="en-US" sz="1600" dirty="0"/>
+          </a:p>
+        </p:txBody>
+      </p:sp>
+      <p:sp>
+        <p:nvSpPr>
+          <p:cNvPr id="8" name="TextBox 7">
+            <a:hlinkClick r:id="rId3"/>
+          </p:cNvPr>
+          <p:cNvSpPr txBox="1"/>
+          <p:nvPr/>
+        </p:nvSpPr>
+        <p:spPr>
+          <a:xfrm>
+            <a:off x="2057400" y="3310128"/>
+            <a:ext cx="5486400" cy="347472"/>
+          </a:xfrm>
+          <a:prstGeom prst="rect">
+            <a:avLst/>
+          </a:prstGeom>
+          <a:noFill/>
+        </p:spPr>
+        <p:txBody>
+          <a:bodyPr wrap="square" lIns="0" tIns="0" bIns="0" rIns="0">
+            <a:noAutofit/>
+          </a:bodyPr>
+          <a:lstStyle/>
+          <a:p>
+            <a:pPr algn="l"/>
+            <a:r>
+              <a:rPr sz="1400" b="1">
+                <a:solidFill>
+                  <a:srgbClr val="2FD26E"/>
+                </a:solidFill>
+                <a:latin typeface="Calibri"/>
+              </a:rPr>
+              <a:t>▸  Abrir en Colab · cuaderno S26 procesado clásico</a:t>
+            </a:r>
+          </a:p>
+        </p:txBody>
+      </p:sp>
+      <p:sp>
+        <p:nvSpPr>
+          <p:cNvPr id="9" name="TextBox 8">
+            <a:hlinkClick r:id="rId4"/>
+          </p:cNvPr>
+          <p:cNvSpPr txBox="1"/>
+          <p:nvPr/>
+        </p:nvSpPr>
+        <p:spPr>
+          <a:xfrm>
+            <a:off x="2057400" y="3675888"/>
+            <a:ext cx="5486400" cy="347472"/>
+          </a:xfrm>
+          <a:prstGeom prst="rect">
+            <a:avLst/>
+          </a:prstGeom>
+          <a:noFill/>
+        </p:spPr>
+        <p:txBody>
+          <a:bodyPr wrap="square" lIns="0" tIns="0" bIns="0" rIns="0">
+            <a:noAutofit/>
+          </a:bodyPr>
+          <a:lstStyle/>
+          <a:p>
+            <a:pPr algn="l"/>
+            <a:r>
+              <a:rPr sz="1400" b="1">
+                <a:solidFill>
+                  <a:srgbClr val="2FD26E"/>
+                </a:solidFill>
+                <a:latin typeface="Calibri"/>
+              </a:rPr>
+              <a:t>▸  Abrir en Colab · cuaderno S27 percepción aprendida</a:t>
+            </a:r>
           </a:p>
         </p:txBody>
       </p:sp>
